--- a/docs/4-答辩演示.pptx
+++ b/docs/4-答辩演示.pptx
@@ -3974,7 +3974,7 @@
                 <a:latin typeface="微软雅黑"/>
                 <a:ea typeface="微软雅黑"/>
               </a:rPr>
-              <a:t>复盘：错题本与学习统计（含饼图）</a:t>
+              <a:t>复盘：统计饼图与得分趋势</a:t>
             </a:r>
           </a:p>
         </p:txBody>
@@ -4014,14 +4014,14 @@
                 <a:latin typeface="微软雅黑"/>
                 <a:ea typeface="微软雅黑"/>
               </a:rPr>
-              <a:t>错题自动收集，进度用图看得更明白</a:t>
+              <a:t>统计页把「哪里弱」和「有没有进步」一次说清</a:t>
             </a:r>
           </a:p>
         </p:txBody>
       </p:sp>
       <p:pic>
         <p:nvPicPr>
-          <p:cNvPr id="6" name="Picture 5" descr="08_wrong_book.png"/>
+          <p:cNvPr id="6" name="Picture 5" descr="crop_pies.png"/>
           <p:cNvPicPr>
             <a:picLocks noChangeAspect="1"/>
           </p:cNvPicPr>
@@ -4035,8 +4035,8 @@
         </p:blipFill>
         <p:spPr>
           <a:xfrm>
-            <a:off x="566928" y="1881754"/>
-            <a:ext cx="5029200" cy="3277370"/>
+            <a:off x="566928" y="1452002"/>
+            <a:ext cx="6949440" cy="1192507"/>
           </a:xfrm>
           <a:prstGeom prst="rect">
             <a:avLst/>
@@ -4045,7 +4045,7 @@
       </p:pic>
       <p:pic>
         <p:nvPicPr>
-          <p:cNvPr id="7" name="Picture 6" descr="crop_pies.png"/>
+          <p:cNvPr id="7" name="Picture 6" descr="crop_trend.png"/>
           <p:cNvPicPr>
             <a:picLocks noChangeAspect="1"/>
           </p:cNvPicPr>
@@ -4059,8 +4059,8 @@
         </p:blipFill>
         <p:spPr>
           <a:xfrm>
-            <a:off x="5806440" y="1602020"/>
-            <a:ext cx="5852160" cy="1139358"/>
+            <a:off x="750654" y="2761488"/>
+            <a:ext cx="6581986" cy="841248"/>
           </a:xfrm>
           <a:prstGeom prst="rect">
             <a:avLst/>
@@ -4069,14 +4069,193 @@
       </p:pic>
       <p:sp>
         <p:nvSpPr>
-          <p:cNvPr id="8" name="TextBox 7"/>
-          <p:cNvSpPr txBox="1"/>
-          <p:nvPr/>
-        </p:nvSpPr>
-        <p:spPr>
-          <a:xfrm>
-            <a:off x="5806440" y="3154680"/>
-            <a:ext cx="5852160" cy="274320"/>
+          <p:cNvPr id="8" name="Rounded Rectangle 7"/>
+          <p:cNvSpPr/>
+          <p:nvPr/>
+        </p:nvSpPr>
+        <p:spPr>
+          <a:xfrm>
+            <a:off x="566928" y="3822191"/>
+            <a:ext cx="6949440" cy="2240280"/>
+          </a:xfrm>
+          <a:prstGeom prst="roundRect">
+            <a:avLst>
+              <a:gd name="adj" fmla="val 4000"/>
+            </a:avLst>
+          </a:prstGeom>
+          <a:solidFill>
+            <a:srgbClr val="1A1E29"/>
+          </a:solidFill>
+          <a:ln w="12700">
+            <a:solidFill>
+              <a:srgbClr val="2A3142"/>
+            </a:solidFill>
+          </a:ln>
+          <a:effectLst/>
+        </p:spPr>
+        <p:style>
+          <a:lnRef idx="1">
+            <a:schemeClr val="accent1"/>
+          </a:lnRef>
+          <a:fillRef idx="3">
+            <a:schemeClr val="accent1"/>
+          </a:fillRef>
+          <a:effectRef idx="2">
+            <a:schemeClr val="accent1"/>
+          </a:effectRef>
+          <a:fontRef idx="minor">
+            <a:schemeClr val="lt1"/>
+          </a:fontRef>
+        </p:style>
+        <p:txBody>
+          <a:bodyPr rtlCol="0" anchor="ctr"/>
+          <a:lstStyle/>
+          <a:p>
+            <a:pPr algn="ctr"/>
+          </a:p>
+        </p:txBody>
+      </p:sp>
+      <p:sp>
+        <p:nvSpPr>
+          <p:cNvPr id="9" name="TextBox 8"/>
+          <p:cNvSpPr txBox="1"/>
+          <p:nvPr/>
+        </p:nvSpPr>
+        <p:spPr>
+          <a:xfrm>
+            <a:off x="868680" y="3977639"/>
+            <a:ext cx="6400800" cy="292608"/>
+          </a:xfrm>
+          <a:prstGeom prst="rect">
+            <a:avLst/>
+          </a:prstGeom>
+          <a:noFill/>
+        </p:spPr>
+        <p:txBody>
+          <a:bodyPr wrap="square" anchor="t" lIns="0" rIns="0" tIns="0" bIns="0">
+            <a:spAutoFit/>
+          </a:bodyPr>
+          <a:lstStyle/>
+          <a:p>
+            <a:pPr algn="l">
+              <a:lnSpc>
+                <a:spcPct val="120000"/>
+              </a:lnSpc>
+            </a:pPr>
+            <a:r>
+              <a:rPr sz="1300" b="1">
+                <a:solidFill>
+                  <a:srgbClr val="4D8DF7"/>
+                </a:solidFill>
+                <a:latin typeface="微软雅黑"/>
+                <a:ea typeface="微软雅黑"/>
+              </a:rPr>
+              <a:t>统计页能做什么</a:t>
+            </a:r>
+          </a:p>
+        </p:txBody>
+      </p:sp>
+      <p:sp>
+        <p:nvSpPr>
+          <p:cNvPr id="10" name="TextBox 9"/>
+          <p:cNvSpPr txBox="1"/>
+          <p:nvPr/>
+        </p:nvSpPr>
+        <p:spPr>
+          <a:xfrm>
+            <a:off x="868680" y="4315968"/>
+            <a:ext cx="6400800" cy="1554480"/>
+          </a:xfrm>
+          <a:prstGeom prst="rect">
+            <a:avLst/>
+          </a:prstGeom>
+          <a:noFill/>
+        </p:spPr>
+        <p:txBody>
+          <a:bodyPr wrap="square" anchor="t" lIns="0" rIns="0" tIns="0" bIns="0">
+            <a:spAutoFit/>
+          </a:bodyPr>
+          <a:lstStyle/>
+          <a:p>
+            <a:pPr algn="l">
+              <a:lnSpc>
+                <a:spcPct val="145000"/>
+              </a:lnSpc>
+            </a:pPr>
+            <a:r>
+              <a:rPr sz="1000" b="0">
+                <a:solidFill>
+                  <a:srgbClr val="8B93A7"/>
+                </a:solidFill>
+                <a:latin typeface="微软雅黑"/>
+                <a:ea typeface="微软雅黑"/>
+              </a:rPr>
+              <a:t>· 两张饼图：学习状态（已通过/需复习/已看题/未开始）与各章已通过数</a:t>
+            </a:r>
+          </a:p>
+          <a:p>
+            <a:pPr algn="l">
+              <a:lnSpc>
+                <a:spcPct val="145000"/>
+              </a:lnSpc>
+            </a:pPr>
+            <a:r>
+              <a:rPr sz="1000" b="0">
+                <a:solidFill>
+                  <a:srgbClr val="8B93A7"/>
+                </a:solidFill>
+                <a:latin typeface="微软雅黑"/>
+                <a:ea typeface="微软雅黑"/>
+              </a:rPr>
+              <a:t>· 折线趋势：历次组卷得分、平均分与最高分，看自己有没有进步</a:t>
+            </a:r>
+          </a:p>
+          <a:p>
+            <a:pPr algn="l">
+              <a:lnSpc>
+                <a:spcPct val="145000"/>
+              </a:lnSpc>
+            </a:pPr>
+            <a:r>
+              <a:rPr sz="1000" b="0">
+                <a:solidFill>
+                  <a:srgbClr val="8B93A7"/>
+                </a:solidFill>
+                <a:latin typeface="微软雅黑"/>
+                <a:ea typeface="微软雅黑"/>
+              </a:rPr>
+              <a:t>· 错题本：最近一次未通过的题自动进入，通过后自动移除</a:t>
+            </a:r>
+          </a:p>
+          <a:p>
+            <a:pPr algn="l">
+              <a:lnSpc>
+                <a:spcPct val="145000"/>
+              </a:lnSpc>
+            </a:pPr>
+            <a:r>
+              <a:rPr sz="1000" b="0">
+                <a:solidFill>
+                  <a:srgbClr val="8B93A7"/>
+                </a:solidFill>
+                <a:latin typeface="微软雅黑"/>
+                <a:ea typeface="微软雅黑"/>
+              </a:rPr>
+              <a:t>· 导出报告：一键导出 CSV（汇总 / 章节进度 / 组卷记录 / 逐题明细）</a:t>
+            </a:r>
+          </a:p>
+        </p:txBody>
+      </p:sp>
+      <p:sp>
+        <p:nvSpPr>
+          <p:cNvPr id="11" name="TextBox 10"/>
+          <p:cNvSpPr txBox="1"/>
+          <p:nvPr/>
+        </p:nvSpPr>
+        <p:spPr>
+          <a:xfrm>
+            <a:off x="7863840" y="1554480"/>
+            <a:ext cx="3749039" cy="292608"/>
           </a:xfrm>
           <a:prstGeom prst="rect">
             <a:avLst/>
@@ -4109,14 +4288,14 @@
       </p:sp>
       <p:sp>
         <p:nvSpPr>
-          <p:cNvPr id="9" name="TextBox 8"/>
-          <p:cNvSpPr txBox="1"/>
-          <p:nvPr/>
-        </p:nvSpPr>
-        <p:spPr>
-          <a:xfrm>
-            <a:off x="5806440" y="3410712"/>
-            <a:ext cx="5852160" cy="548640"/>
+          <p:cNvPr id="12" name="TextBox 11"/>
+          <p:cNvSpPr txBox="1"/>
+          <p:nvPr/>
+        </p:nvSpPr>
+        <p:spPr>
+          <a:xfrm>
+            <a:off x="7863840" y="1828800"/>
+            <a:ext cx="3749039" cy="566928"/>
           </a:xfrm>
           <a:prstGeom prst="rect">
             <a:avLst/>
@@ -4142,9 +4321,72 @@
                 <a:latin typeface="微软雅黑"/>
                 <a:ea typeface="微软雅黑"/>
               </a:rPr>
-              <a:t>左：学习状态（已通过 / 需复习 / 已看题 / 未开始）</a:t>
-            </a:r>
-          </a:p>
+              <a:t>图例带数量与百分比，环形中心显示总量</a:t>
+            </a:r>
+          </a:p>
+        </p:txBody>
+      </p:sp>
+      <p:sp>
+        <p:nvSpPr>
+          <p:cNvPr id="13" name="TextBox 12"/>
+          <p:cNvSpPr txBox="1"/>
+          <p:nvPr/>
+        </p:nvSpPr>
+        <p:spPr>
+          <a:xfrm>
+            <a:off x="7863840" y="2651760"/>
+            <a:ext cx="3749039" cy="292608"/>
+          </a:xfrm>
+          <a:prstGeom prst="rect">
+            <a:avLst/>
+          </a:prstGeom>
+          <a:noFill/>
+        </p:spPr>
+        <p:txBody>
+          <a:bodyPr wrap="square" anchor="t" lIns="0" rIns="0" tIns="0" bIns="0">
+            <a:spAutoFit/>
+          </a:bodyPr>
+          <a:lstStyle/>
+          <a:p>
+            <a:pPr algn="l">
+              <a:lnSpc>
+                <a:spcPct val="120000"/>
+              </a:lnSpc>
+            </a:pPr>
+            <a:r>
+              <a:rPr sz="1150" b="1">
+                <a:solidFill>
+                  <a:srgbClr val="3DDC84"/>
+                </a:solidFill>
+                <a:latin typeface="微软雅黑"/>
+                <a:ea typeface="微软雅黑"/>
+              </a:rPr>
+              <a:t>得分趋势</a:t>
+            </a:r>
+          </a:p>
+        </p:txBody>
+      </p:sp>
+      <p:sp>
+        <p:nvSpPr>
+          <p:cNvPr id="14" name="TextBox 13"/>
+          <p:cNvSpPr txBox="1"/>
+          <p:nvPr/>
+        </p:nvSpPr>
+        <p:spPr>
+          <a:xfrm>
+            <a:off x="7863840" y="2926079"/>
+            <a:ext cx="3749039" cy="566928"/>
+          </a:xfrm>
+          <a:prstGeom prst="rect">
+            <a:avLst/>
+          </a:prstGeom>
+          <a:noFill/>
+        </p:spPr>
+        <p:txBody>
+          <a:bodyPr wrap="square" anchor="t" lIns="0" rIns="0" tIns="0" bIns="0">
+            <a:spAutoFit/>
+          </a:bodyPr>
+          <a:lstStyle/>
           <a:p>
             <a:pPr algn="l">
               <a:lnSpc>
@@ -4159,21 +4401,21 @@
                 <a:latin typeface="微软雅黑"/>
                 <a:ea typeface="微软雅黑"/>
               </a:rPr>
-              <a:t>右：各章已通过数</a:t>
-            </a:r>
-          </a:p>
-        </p:txBody>
-      </p:sp>
-      <p:sp>
-        <p:nvSpPr>
-          <p:cNvPr id="10" name="TextBox 9"/>
-          <p:cNvSpPr txBox="1"/>
-          <p:nvPr/>
-        </p:nvSpPr>
-        <p:spPr>
-          <a:xfrm>
-            <a:off x="5806440" y="3904488"/>
-            <a:ext cx="5852160" cy="274320"/>
+              <a:t>按时间顺序画折线，配色区分优良中差</a:t>
+            </a:r>
+          </a:p>
+        </p:txBody>
+      </p:sp>
+      <p:sp>
+        <p:nvSpPr>
+          <p:cNvPr id="15" name="TextBox 14"/>
+          <p:cNvSpPr txBox="1"/>
+          <p:nvPr/>
+        </p:nvSpPr>
+        <p:spPr>
+          <a:xfrm>
+            <a:off x="7863840" y="3749039"/>
+            <a:ext cx="3749039" cy="292608"/>
           </a:xfrm>
           <a:prstGeom prst="rect">
             <a:avLst/>
@@ -4194,26 +4436,26 @@
             <a:r>
               <a:rPr sz="1150" b="1">
                 <a:solidFill>
-                  <a:srgbClr val="4D8DF7"/>
-                </a:solidFill>
-                <a:latin typeface="微软雅黑"/>
-                <a:ea typeface="微软雅黑"/>
-              </a:rPr>
-              <a:t>图例带数据</a:t>
-            </a:r>
-          </a:p>
-        </p:txBody>
-      </p:sp>
-      <p:sp>
-        <p:nvSpPr>
-          <p:cNvPr id="11" name="TextBox 10"/>
-          <p:cNvSpPr txBox="1"/>
-          <p:nvPr/>
-        </p:nvSpPr>
-        <p:spPr>
-          <a:xfrm>
-            <a:off x="5806440" y="4160520"/>
-            <a:ext cx="5852160" cy="548640"/>
+                  <a:srgbClr val="F5C451"/>
+                </a:solidFill>
+                <a:latin typeface="微软雅黑"/>
+                <a:ea typeface="微软雅黑"/>
+              </a:rPr>
+              <a:t>与列表联动</a:t>
+            </a:r>
+          </a:p>
+        </p:txBody>
+      </p:sp>
+      <p:sp>
+        <p:nvSpPr>
+          <p:cNvPr id="16" name="TextBox 15"/>
+          <p:cNvSpPr txBox="1"/>
+          <p:nvPr/>
+        </p:nvSpPr>
+        <p:spPr>
+          <a:xfrm>
+            <a:off x="7863840" y="4023359"/>
+            <a:ext cx="3749039" cy="566928"/>
           </a:xfrm>
           <a:prstGeom prst="rect">
             <a:avLst/>
@@ -4239,21 +4481,21 @@
                 <a:latin typeface="微软雅黑"/>
                 <a:ea typeface="微软雅黑"/>
               </a:rPr>
-              <a:t>每项显示数量与百分比，鼠标不用悬停也能读</a:t>
-            </a:r>
-          </a:p>
-        </p:txBody>
-      </p:sp>
-      <p:sp>
-        <p:nvSpPr>
-          <p:cNvPr id="12" name="TextBox 11"/>
-          <p:cNvSpPr txBox="1"/>
-          <p:nvPr/>
-        </p:nvSpPr>
-        <p:spPr>
-          <a:xfrm>
-            <a:off x="5806440" y="4654296"/>
-            <a:ext cx="5852160" cy="274320"/>
+              <a:t>图表和下方表格共用同一份数据</a:t>
+            </a:r>
+          </a:p>
+        </p:txBody>
+      </p:sp>
+      <p:sp>
+        <p:nvSpPr>
+          <p:cNvPr id="17" name="TextBox 16"/>
+          <p:cNvSpPr txBox="1"/>
+          <p:nvPr/>
+        </p:nvSpPr>
+        <p:spPr>
+          <a:xfrm>
+            <a:off x="7863840" y="4846320"/>
+            <a:ext cx="3749039" cy="292608"/>
           </a:xfrm>
           <a:prstGeom prst="rect">
             <a:avLst/>
@@ -4274,26 +4516,26 @@
             <a:r>
               <a:rPr sz="1150" b="1">
                 <a:solidFill>
-                  <a:srgbClr val="4D8DF7"/>
-                </a:solidFill>
-                <a:latin typeface="微软雅黑"/>
-                <a:ea typeface="微软雅黑"/>
-              </a:rPr>
-              <a:t>环形中心</a:t>
-            </a:r>
-          </a:p>
-        </p:txBody>
-      </p:sp>
-      <p:sp>
-        <p:nvSpPr>
-          <p:cNvPr id="13" name="TextBox 12"/>
-          <p:cNvSpPr txBox="1"/>
-          <p:nvPr/>
-        </p:nvSpPr>
-        <p:spPr>
-          <a:xfrm>
-            <a:off x="5806440" y="4910328"/>
-            <a:ext cx="5852160" cy="548640"/>
+                  <a:srgbClr val="C678DD"/>
+                </a:solidFill>
+                <a:latin typeface="微软雅黑"/>
+                <a:ea typeface="微软雅黑"/>
+              </a:rPr>
+              <a:t>导出 CSV</a:t>
+            </a:r>
+          </a:p>
+        </p:txBody>
+      </p:sp>
+      <p:sp>
+        <p:nvSpPr>
+          <p:cNvPr id="18" name="TextBox 17"/>
+          <p:cNvSpPr txBox="1"/>
+          <p:nvPr/>
+        </p:nvSpPr>
+        <p:spPr>
+          <a:xfrm>
+            <a:off x="7863840" y="5120640"/>
+            <a:ext cx="3749039" cy="566928"/>
           </a:xfrm>
           <a:prstGeom prst="rect">
             <a:avLst/>
@@ -4319,127 +4561,7 @@
                 <a:latin typeface="微软雅黑"/>
                 <a:ea typeface="微软雅黑"/>
               </a:rPr>
-              <a:t>显示该图的总题数，一眼知道基量</a:t>
-            </a:r>
-          </a:p>
-        </p:txBody>
-      </p:sp>
-      <p:sp>
-        <p:nvSpPr>
-          <p:cNvPr id="14" name="TextBox 13"/>
-          <p:cNvSpPr txBox="1"/>
-          <p:nvPr/>
-        </p:nvSpPr>
-        <p:spPr>
-          <a:xfrm>
-            <a:off x="5806440" y="5404104"/>
-            <a:ext cx="5852160" cy="274320"/>
-          </a:xfrm>
-          <a:prstGeom prst="rect">
-            <a:avLst/>
-          </a:prstGeom>
-          <a:noFill/>
-        </p:spPr>
-        <p:txBody>
-          <a:bodyPr wrap="square" anchor="t" lIns="0" rIns="0" tIns="0" bIns="0">
-            <a:spAutoFit/>
-          </a:bodyPr>
-          <a:lstStyle/>
-          <a:p>
-            <a:pPr algn="l">
-              <a:lnSpc>
-                <a:spcPct val="120000"/>
-              </a:lnSpc>
-            </a:pPr>
-            <a:r>
-              <a:rPr sz="1150" b="1">
-                <a:solidFill>
-                  <a:srgbClr val="4D8DF7"/>
-                </a:solidFill>
-                <a:latin typeface="微软雅黑"/>
-                <a:ea typeface="微软雅黑"/>
-              </a:rPr>
-              <a:t>与列表联动</a:t>
-            </a:r>
-          </a:p>
-        </p:txBody>
-      </p:sp>
-      <p:sp>
-        <p:nvSpPr>
-          <p:cNvPr id="15" name="TextBox 14"/>
-          <p:cNvSpPr txBox="1"/>
-          <p:nvPr/>
-        </p:nvSpPr>
-        <p:spPr>
-          <a:xfrm>
-            <a:off x="5806440" y="5660136"/>
-            <a:ext cx="5852160" cy="548640"/>
-          </a:xfrm>
-          <a:prstGeom prst="rect">
-            <a:avLst/>
-          </a:prstGeom>
-          <a:noFill/>
-        </p:spPr>
-        <p:txBody>
-          <a:bodyPr wrap="square" anchor="t" lIns="0" rIns="0" tIns="0" bIns="0">
-            <a:spAutoFit/>
-          </a:bodyPr>
-          <a:lstStyle/>
-          <a:p>
-            <a:pPr algn="l">
-              <a:lnSpc>
-                <a:spcPct val="130000"/>
-              </a:lnSpc>
-            </a:pPr>
-            <a:r>
-              <a:rPr sz="950" b="0">
-                <a:solidFill>
-                  <a:srgbClr val="8B93A7"/>
-                </a:solidFill>
-                <a:latin typeface="微软雅黑"/>
-                <a:ea typeface="微软雅黑"/>
-              </a:rPr>
-              <a:t>下面表格仍可点击跳题，图与表同一份数据</a:t>
-            </a:r>
-          </a:p>
-        </p:txBody>
-      </p:sp>
-      <p:sp>
-        <p:nvSpPr>
-          <p:cNvPr id="16" name="TextBox 15"/>
-          <p:cNvSpPr txBox="1"/>
-          <p:nvPr/>
-        </p:nvSpPr>
-        <p:spPr>
-          <a:xfrm>
-            <a:off x="566928" y="5806440"/>
-            <a:ext cx="5029200" cy="320040"/>
-          </a:xfrm>
-          <a:prstGeom prst="rect">
-            <a:avLst/>
-          </a:prstGeom>
-          <a:noFill/>
-        </p:spPr>
-        <p:txBody>
-          <a:bodyPr wrap="square" anchor="t" lIns="0" rIns="0" tIns="0" bIns="0">
-            <a:spAutoFit/>
-          </a:bodyPr>
-          <a:lstStyle/>
-          <a:p>
-            <a:pPr algn="l">
-              <a:lnSpc>
-                <a:spcPct val="120000"/>
-              </a:lnSpc>
-            </a:pPr>
-            <a:r>
-              <a:rPr sz="1000" b="0">
-                <a:solidFill>
-                  <a:srgbClr val="8B93A7"/>
-                </a:solidFill>
-                <a:latin typeface="微软雅黑"/>
-                <a:ea typeface="微软雅黑"/>
-              </a:rPr>
-              <a:t>错题本：最近一次未通过的题自动进入，通过后移除</a:t>
+              <a:t>Excel 双击即开，答辩材料可直接引用</a:t>
             </a:r>
           </a:p>
         </p:txBody>
@@ -4650,8 +4772,8 @@
         </p:blipFill>
         <p:spPr>
           <a:xfrm>
-            <a:off x="566928" y="1426572"/>
-            <a:ext cx="7589520" cy="1535974"/>
+            <a:off x="939813" y="1417320"/>
+            <a:ext cx="6843749" cy="1554479"/>
           </a:xfrm>
           <a:prstGeom prst="rect">
             <a:avLst/>
@@ -4781,7 +4903,7 @@
                 <a:latin typeface="微软雅黑"/>
                 <a:ea typeface="微软雅黑"/>
               </a:rPr>
-              <a:t>按章节轮转抽题</a:t>
+              <a:t>按错题加权（默认）</a:t>
             </a:r>
           </a:p>
         </p:txBody>
@@ -4821,7 +4943,7 @@
                 <a:latin typeface="微软雅黑"/>
                 <a:ea typeface="微软雅黑"/>
               </a:rPr>
-              <a:t>每轮从各章剩余题里取一题，保证章节覆盖均衡，不会全抽到同一章</a:t>
+              <a:t>错得多、没掌握的题权重更高；也可切回「章节均衡」按章均匀出题</a:t>
             </a:r>
           </a:p>
         </p:txBody>
@@ -4861,7 +4983,7 @@
                 <a:latin typeface="微软雅黑"/>
                 <a:ea typeface="微软雅黑"/>
               </a:rPr>
-              <a:t>随机且可复现</a:t>
+              <a:t>按章节轮转抽题</a:t>
             </a:r>
           </a:p>
         </p:txBody>
@@ -4901,7 +5023,7 @@
                 <a:latin typeface="微软雅黑"/>
                 <a:ea typeface="微软雅黑"/>
               </a:rPr>
-              <a:t>用随机数生成器抽样，测试时传固定种子即可复现同一套卷子</a:t>
+              <a:t>章节均衡模式下，每轮从各章剩余题里取一题，保证覆盖面</a:t>
             </a:r>
           </a:p>
         </p:txBody>
@@ -4941,7 +5063,7 @@
                 <a:latin typeface="微软雅黑"/>
                 <a:ea typeface="微软雅黑"/>
               </a:rPr>
-              <a:t>题量不足会提示</a:t>
+              <a:t>随机且可复现</a:t>
             </a:r>
           </a:p>
         </p:txBody>
@@ -4981,7 +5103,7 @@
                 <a:latin typeface="微软雅黑"/>
                 <a:ea typeface="微软雅黑"/>
               </a:rPr>
-              <a:t>可用题数少于要求时直接提示「只有 N 题，不够出 M 道」，不出半套卷</a:t>
+              <a:t>用随机数生成器抽样，测试时传固定种子即可复现同一套卷子</a:t>
             </a:r>
           </a:p>
         </p:txBody>
@@ -5021,7 +5143,7 @@
                 <a:latin typeface="微软雅黑"/>
                 <a:ea typeface="微软雅黑"/>
               </a:rPr>
-              <a:t>考试规则同步生效</a:t>
+              <a:t>题量不足会提示</a:t>
             </a:r>
           </a:p>
         </p:txBody>
@@ -5061,6 +5183,86 @@
                 <a:latin typeface="微软雅黑"/>
                 <a:ea typeface="微软雅黑"/>
               </a:rPr>
+              <a:t>可用题数少于要求时直接提示「只有 N 题，不够出 M 道」，不出半套卷</a:t>
+            </a:r>
+          </a:p>
+        </p:txBody>
+      </p:sp>
+      <p:sp>
+        <p:nvSpPr>
+          <p:cNvPr id="17" name="TextBox 16"/>
+          <p:cNvSpPr txBox="1"/>
+          <p:nvPr/>
+        </p:nvSpPr>
+        <p:spPr>
+          <a:xfrm>
+            <a:off x="868680" y="6108192"/>
+            <a:ext cx="2377440" cy="310896"/>
+          </a:xfrm>
+          <a:prstGeom prst="rect">
+            <a:avLst/>
+          </a:prstGeom>
+          <a:noFill/>
+        </p:spPr>
+        <p:txBody>
+          <a:bodyPr wrap="square" anchor="t" lIns="0" rIns="0" tIns="0" bIns="0">
+            <a:spAutoFit/>
+          </a:bodyPr>
+          <a:lstStyle/>
+          <a:p>
+            <a:pPr algn="l">
+              <a:lnSpc>
+                <a:spcPct val="120000"/>
+              </a:lnSpc>
+            </a:pPr>
+            <a:r>
+              <a:rPr sz="1100" b="1">
+                <a:solidFill>
+                  <a:srgbClr val="E9EDF5"/>
+                </a:solidFill>
+                <a:latin typeface="微软雅黑"/>
+                <a:ea typeface="微软雅黑"/>
+              </a:rPr>
+              <a:t>考试规则同步生效</a:t>
+            </a:r>
+          </a:p>
+        </p:txBody>
+      </p:sp>
+      <p:sp>
+        <p:nvSpPr>
+          <p:cNvPr id="18" name="TextBox 17"/>
+          <p:cNvSpPr txBox="1"/>
+          <p:nvPr/>
+        </p:nvSpPr>
+        <p:spPr>
+          <a:xfrm>
+            <a:off x="3246120" y="6108192"/>
+            <a:ext cx="4663440" cy="457200"/>
+          </a:xfrm>
+          <a:prstGeom prst="rect">
+            <a:avLst/>
+          </a:prstGeom>
+          <a:noFill/>
+        </p:spPr>
+        <p:txBody>
+          <a:bodyPr wrap="square" anchor="t" lIns="0" rIns="0" tIns="0" bIns="0">
+            <a:spAutoFit/>
+          </a:bodyPr>
+          <a:lstStyle/>
+          <a:p>
+            <a:pPr algn="l">
+              <a:lnSpc>
+                <a:spcPct val="130000"/>
+              </a:lnSpc>
+            </a:pPr>
+            <a:r>
+              <a:rPr sz="950" b="0">
+                <a:solidFill>
+                  <a:srgbClr val="8B93A7"/>
+                </a:solidFill>
+                <a:latin typeface="微软雅黑"/>
+                <a:ea typeface="微软雅黑"/>
+              </a:rPr>
               <a:t>限时、禁用答案入口、交卷评分都在进入考试时一起生效</a:t>
             </a:r>
           </a:p>
@@ -5068,7 +5270,7 @@
       </p:sp>
       <p:sp>
         <p:nvSpPr>
-          <p:cNvPr id="17" name="TextBox 16"/>
+          <p:cNvPr id="19" name="TextBox 18"/>
           <p:cNvSpPr txBox="1"/>
           <p:nvPr/>
         </p:nvSpPr>
@@ -5108,7 +5310,7 @@
       </p:sp>
       <p:sp>
         <p:nvSpPr>
-          <p:cNvPr id="18" name="TextBox 17"/>
+          <p:cNvPr id="20" name="TextBox 19"/>
           <p:cNvSpPr txBox="1"/>
           <p:nvPr/>
         </p:nvSpPr>
@@ -5148,7 +5350,7 @@
       </p:sp>
       <p:sp>
         <p:nvSpPr>
-          <p:cNvPr id="19" name="TextBox 18"/>
+          <p:cNvPr id="21" name="TextBox 20"/>
           <p:cNvSpPr txBox="1"/>
           <p:nvPr/>
         </p:nvSpPr>
@@ -5188,7 +5390,7 @@
       </p:sp>
       <p:sp>
         <p:nvSpPr>
-          <p:cNvPr id="20" name="TextBox 19"/>
+          <p:cNvPr id="22" name="TextBox 21"/>
           <p:cNvSpPr txBox="1"/>
           <p:nvPr/>
         </p:nvSpPr>
@@ -5228,7 +5430,7 @@
       </p:sp>
       <p:sp>
         <p:nvSpPr>
-          <p:cNvPr id="21" name="TextBox 20"/>
+          <p:cNvPr id="23" name="TextBox 22"/>
           <p:cNvSpPr txBox="1"/>
           <p:nvPr/>
         </p:nvSpPr>
@@ -5268,7 +5470,7 @@
       </p:sp>
       <p:sp>
         <p:nvSpPr>
-          <p:cNvPr id="22" name="TextBox 21"/>
+          <p:cNvPr id="24" name="TextBox 23"/>
           <p:cNvSpPr txBox="1"/>
           <p:nvPr/>
         </p:nvSpPr>
@@ -5308,7 +5510,7 @@
       </p:sp>
       <p:sp>
         <p:nvSpPr>
-          <p:cNvPr id="23" name="TextBox 22"/>
+          <p:cNvPr id="25" name="TextBox 24"/>
           <p:cNvSpPr txBox="1"/>
           <p:nvPr/>
         </p:nvSpPr>
@@ -5348,7 +5550,7 @@
       </p:sp>
       <p:sp>
         <p:nvSpPr>
-          <p:cNvPr id="24" name="TextBox 23"/>
+          <p:cNvPr id="26" name="TextBox 25"/>
           <p:cNvSpPr txBox="1"/>
           <p:nvPr/>
         </p:nvSpPr>
@@ -5388,7 +5590,7 @@
       </p:sp>
       <p:sp>
         <p:nvSpPr>
-          <p:cNvPr id="25" name="TextBox 24"/>
+          <p:cNvPr id="27" name="TextBox 26"/>
           <p:cNvSpPr txBox="1"/>
           <p:nvPr/>
         </p:nvSpPr>
